--- a/How Great is Our God.pptx
+++ b/How Great is Our God.pptx
@@ -7,9 +7,11 @@
   <p:sldIdLst>
     <p:sldId id="274" r:id="rId2"/>
     <p:sldId id="280" r:id="rId3"/>
-    <p:sldId id="279" r:id="rId4"/>
-    <p:sldId id="281" r:id="rId5"/>
-    <p:sldId id="282" r:id="rId6"/>
+    <p:sldId id="284" r:id="rId4"/>
+    <p:sldId id="279" r:id="rId5"/>
+    <p:sldId id="281" r:id="rId6"/>
+    <p:sldId id="283" r:id="rId7"/>
+    <p:sldId id="282" r:id="rId8"/>
   </p:sldIdLst>
   <p:sldSz cx="9144000" cy="6858000" type="screen4x3"/>
   <p:notesSz cx="6858000" cy="9144000"/>
@@ -247,7 +249,7 @@
           <a:p>
             <a:fld id="{E759A0DE-F190-5444-87AC-4719D5F20D15}" type="datetimeFigureOut">
               <a:rPr lang="en-US" smtClean="0"/>
-              <a:t>8/3/26</a:t>
+              <a:t>9/24/26</a:t>
             </a:fld>
             <a:endParaRPr lang="en-US"/>
           </a:p>
@@ -417,7 +419,7 @@
           <a:p>
             <a:fld id="{E759A0DE-F190-5444-87AC-4719D5F20D15}" type="datetimeFigureOut">
               <a:rPr lang="en-US" smtClean="0"/>
-              <a:t>8/3/26</a:t>
+              <a:t>9/24/26</a:t>
             </a:fld>
             <a:endParaRPr lang="en-US"/>
           </a:p>
@@ -597,7 +599,7 @@
           <a:p>
             <a:fld id="{E759A0DE-F190-5444-87AC-4719D5F20D15}" type="datetimeFigureOut">
               <a:rPr lang="en-US" smtClean="0"/>
-              <a:t>8/3/26</a:t>
+              <a:t>9/24/26</a:t>
             </a:fld>
             <a:endParaRPr lang="en-US"/>
           </a:p>
@@ -767,7 +769,7 @@
           <a:p>
             <a:fld id="{E759A0DE-F190-5444-87AC-4719D5F20D15}" type="datetimeFigureOut">
               <a:rPr lang="en-US" smtClean="0"/>
-              <a:t>8/3/26</a:t>
+              <a:t>9/24/26</a:t>
             </a:fld>
             <a:endParaRPr lang="en-US"/>
           </a:p>
@@ -1013,7 +1015,7 @@
           <a:p>
             <a:fld id="{E759A0DE-F190-5444-87AC-4719D5F20D15}" type="datetimeFigureOut">
               <a:rPr lang="en-US" smtClean="0"/>
-              <a:t>8/3/26</a:t>
+              <a:t>9/24/26</a:t>
             </a:fld>
             <a:endParaRPr lang="en-US"/>
           </a:p>
@@ -1245,7 +1247,7 @@
           <a:p>
             <a:fld id="{E759A0DE-F190-5444-87AC-4719D5F20D15}" type="datetimeFigureOut">
               <a:rPr lang="en-US" smtClean="0"/>
-              <a:t>8/3/26</a:t>
+              <a:t>9/24/26</a:t>
             </a:fld>
             <a:endParaRPr lang="en-US"/>
           </a:p>
@@ -1612,7 +1614,7 @@
           <a:p>
             <a:fld id="{E759A0DE-F190-5444-87AC-4719D5F20D15}" type="datetimeFigureOut">
               <a:rPr lang="en-US" smtClean="0"/>
-              <a:t>8/3/26</a:t>
+              <a:t>9/24/26</a:t>
             </a:fld>
             <a:endParaRPr lang="en-US"/>
           </a:p>
@@ -1730,7 +1732,7 @@
           <a:p>
             <a:fld id="{E759A0DE-F190-5444-87AC-4719D5F20D15}" type="datetimeFigureOut">
               <a:rPr lang="en-US" smtClean="0"/>
-              <a:t>8/3/26</a:t>
+              <a:t>9/24/26</a:t>
             </a:fld>
             <a:endParaRPr lang="en-US"/>
           </a:p>
@@ -1825,7 +1827,7 @@
           <a:p>
             <a:fld id="{E759A0DE-F190-5444-87AC-4719D5F20D15}" type="datetimeFigureOut">
               <a:rPr lang="en-US" smtClean="0"/>
-              <a:t>8/3/26</a:t>
+              <a:t>9/24/26</a:t>
             </a:fld>
             <a:endParaRPr lang="en-US"/>
           </a:p>
@@ -2102,7 +2104,7 @@
           <a:p>
             <a:fld id="{E759A0DE-F190-5444-87AC-4719D5F20D15}" type="datetimeFigureOut">
               <a:rPr lang="en-US" smtClean="0"/>
-              <a:t>8/3/26</a:t>
+              <a:t>9/24/26</a:t>
             </a:fld>
             <a:endParaRPr lang="en-US"/>
           </a:p>
@@ -2359,7 +2361,7 @@
           <a:p>
             <a:fld id="{E759A0DE-F190-5444-87AC-4719D5F20D15}" type="datetimeFigureOut">
               <a:rPr lang="en-US" smtClean="0"/>
-              <a:t>8/3/26</a:t>
+              <a:t>9/24/26</a:t>
             </a:fld>
             <a:endParaRPr lang="en-US"/>
           </a:p>
@@ -2572,7 +2574,7 @@
           <a:p>
             <a:fld id="{E759A0DE-F190-5444-87AC-4719D5F20D15}" type="datetimeFigureOut">
               <a:rPr lang="en-US" smtClean="0"/>
-              <a:t>8/3/26</a:t>
+              <a:t>9/24/26</a:t>
             </a:fld>
             <a:endParaRPr lang="en-US"/>
           </a:p>
@@ -3317,6 +3319,15 @@
           </a:bodyPr>
           <a:lstStyle/>
           <a:p>
+            <a:endParaRPr lang="en-US" sz="4000" dirty="0">
+              <a:solidFill>
+                <a:schemeClr val="bg1"/>
+              </a:solidFill>
+              <a:latin typeface="Avenir Medium" panose="02000503020000020003" pitchFamily="2" charset="0"/>
+              <a:ea typeface="Bodoni Ornaments" pitchFamily="2" charset="0"/>
+            </a:endParaRPr>
+          </a:p>
+          <a:p>
             <a:r>
               <a:rPr lang="en-US" sz="4000" dirty="0">
                 <a:solidFill>
@@ -3325,8 +3336,29 @@
                 <a:latin typeface="Avenir Medium" panose="02000503020000020003" pitchFamily="2" charset="0"/>
                 <a:ea typeface="Bodoni Ornaments" pitchFamily="2" charset="0"/>
               </a:rPr>
-              <a:t>The splendor of a King, clothed in majesty</a:t>
-            </a:r>
+              <a:t>The splendor of a King, </a:t>
+            </a:r>
+          </a:p>
+          <a:p>
+            <a:r>
+              <a:rPr lang="en-US" sz="4000" dirty="0">
+                <a:solidFill>
+                  <a:schemeClr val="bg1"/>
+                </a:solidFill>
+                <a:latin typeface="Avenir Medium" panose="02000503020000020003" pitchFamily="2" charset="0"/>
+                <a:ea typeface="Bodoni Ornaments" pitchFamily="2" charset="0"/>
+              </a:rPr>
+              <a:t>clothed in majesty</a:t>
+            </a:r>
+          </a:p>
+          <a:p>
+            <a:endParaRPr lang="en-US" sz="4000" dirty="0">
+              <a:solidFill>
+                <a:schemeClr val="bg1"/>
+              </a:solidFill>
+              <a:latin typeface="Avenir Medium" panose="02000503020000020003" pitchFamily="2" charset="0"/>
+              <a:ea typeface="Bodoni Ornaments" pitchFamily="2" charset="0"/>
+            </a:endParaRPr>
           </a:p>
           <a:p>
             <a:r>
@@ -3350,42 +3382,6 @@
                 <a:ea typeface="Bodoni Ornaments" pitchFamily="2" charset="0"/>
               </a:rPr>
               <a:t>All the earth rejoice</a:t>
-            </a:r>
-          </a:p>
-          <a:p>
-            <a:r>
-              <a:rPr lang="en-US" sz="4000" dirty="0">
-                <a:solidFill>
-                  <a:schemeClr val="bg1"/>
-                </a:solidFill>
-                <a:latin typeface="Avenir Medium" panose="02000503020000020003" pitchFamily="2" charset="0"/>
-                <a:ea typeface="Bodoni Ornaments" pitchFamily="2" charset="0"/>
-              </a:rPr>
-              <a:t>He wraps himself in Light, and darkness tries to hide</a:t>
-            </a:r>
-          </a:p>
-          <a:p>
-            <a:r>
-              <a:rPr lang="en-US" sz="4000" dirty="0">
-                <a:solidFill>
-                  <a:schemeClr val="bg1"/>
-                </a:solidFill>
-                <a:latin typeface="Avenir Medium" panose="02000503020000020003" pitchFamily="2" charset="0"/>
-                <a:ea typeface="Bodoni Ornaments" pitchFamily="2" charset="0"/>
-              </a:rPr>
-              <a:t>And trembles at His voice</a:t>
-            </a:r>
-          </a:p>
-          <a:p>
-            <a:r>
-              <a:rPr lang="en-US" sz="4000" dirty="0">
-                <a:solidFill>
-                  <a:schemeClr val="bg1"/>
-                </a:solidFill>
-                <a:latin typeface="Avenir Medium" panose="02000503020000020003" pitchFamily="2" charset="0"/>
-                <a:ea typeface="Bodoni Ornaments" pitchFamily="2" charset="0"/>
-              </a:rPr>
-              <a:t>Trembles at His voice</a:t>
             </a:r>
           </a:p>
         </p:txBody>
@@ -3404,6 +3400,155 @@
 </file>
 
 <file path=ppt/slides/slide3.xml><?xml version="1.0" encoding="utf-8"?>
+<p:sld xmlns:a="http://schemas.openxmlformats.org/drawingml/2006/main" xmlns:r="http://schemas.openxmlformats.org/officeDocument/2006/relationships" xmlns:p="http://schemas.openxmlformats.org/presentationml/2006/main">
+  <p:cSld>
+    <p:bg>
+      <p:bgPr>
+        <a:solidFill>
+          <a:schemeClr val="tx1"/>
+        </a:solidFill>
+        <a:effectLst/>
+      </p:bgPr>
+    </p:bg>
+    <p:spTree>
+      <p:nvGrpSpPr>
+        <p:cNvPr id="1" name="">
+          <a:extLst>
+            <a:ext uri="{FF2B5EF4-FFF2-40B4-BE49-F238E27FC236}">
+              <a16:creationId xmlns:a16="http://schemas.microsoft.com/office/drawing/2014/main" id="{82E6B110-3E10-4B53-3F11-46094839F63E}"/>
+            </a:ext>
+          </a:extLst>
+        </p:cNvPr>
+        <p:cNvGrpSpPr/>
+        <p:nvPr/>
+      </p:nvGrpSpPr>
+      <p:grpSpPr>
+        <a:xfrm>
+          <a:off x="0" y="0"/>
+          <a:ext cx="0" cy="0"/>
+          <a:chOff x="0" y="0"/>
+          <a:chExt cx="0" cy="0"/>
+        </a:xfrm>
+      </p:grpSpPr>
+      <p:sp>
+        <p:nvSpPr>
+          <p:cNvPr id="3" name="Subtitle 2">
+            <a:extLst>
+              <a:ext uri="{FF2B5EF4-FFF2-40B4-BE49-F238E27FC236}">
+                <a16:creationId xmlns:a16="http://schemas.microsoft.com/office/drawing/2014/main" id="{5BDEC68E-D63E-8B02-7D47-D19225E4AB2E}"/>
+              </a:ext>
+            </a:extLst>
+          </p:cNvPr>
+          <p:cNvSpPr>
+            <a:spLocks noGrp="1"/>
+          </p:cNvSpPr>
+          <p:nvPr>
+            <p:ph type="subTitle" idx="1"/>
+          </p:nvPr>
+        </p:nvSpPr>
+        <p:spPr>
+          <a:xfrm>
+            <a:off x="84221" y="213360"/>
+            <a:ext cx="8891337" cy="6416040"/>
+          </a:xfrm>
+        </p:spPr>
+        <p:txBody>
+          <a:bodyPr>
+            <a:noAutofit/>
+          </a:bodyPr>
+          <a:lstStyle/>
+          <a:p>
+            <a:endParaRPr lang="en-US" sz="4000" dirty="0">
+              <a:solidFill>
+                <a:schemeClr val="bg1"/>
+              </a:solidFill>
+              <a:latin typeface="Avenir Medium" panose="02000503020000020003" pitchFamily="2" charset="0"/>
+              <a:ea typeface="Bodoni Ornaments" pitchFamily="2" charset="0"/>
+            </a:endParaRPr>
+          </a:p>
+          <a:p>
+            <a:r>
+              <a:rPr lang="en-US" sz="4000" dirty="0">
+                <a:solidFill>
+                  <a:schemeClr val="bg1"/>
+                </a:solidFill>
+                <a:latin typeface="Avenir Medium" panose="02000503020000020003" pitchFamily="2" charset="0"/>
+                <a:ea typeface="Bodoni Ornaments" pitchFamily="2" charset="0"/>
+              </a:rPr>
+              <a:t>He wraps himself in Light, </a:t>
+            </a:r>
+          </a:p>
+          <a:p>
+            <a:r>
+              <a:rPr lang="en-US" sz="4000" dirty="0">
+                <a:solidFill>
+                  <a:schemeClr val="bg1"/>
+                </a:solidFill>
+                <a:latin typeface="Avenir Medium" panose="02000503020000020003" pitchFamily="2" charset="0"/>
+                <a:ea typeface="Bodoni Ornaments" pitchFamily="2" charset="0"/>
+              </a:rPr>
+              <a:t>and darkness tries to hide</a:t>
+            </a:r>
+          </a:p>
+          <a:p>
+            <a:endParaRPr lang="en-US" sz="4000">
+              <a:solidFill>
+                <a:schemeClr val="bg1"/>
+              </a:solidFill>
+              <a:latin typeface="Avenir Medium" panose="02000503020000020003" pitchFamily="2" charset="0"/>
+              <a:ea typeface="Bodoni Ornaments" pitchFamily="2" charset="0"/>
+            </a:endParaRPr>
+          </a:p>
+          <a:p>
+            <a:r>
+              <a:rPr lang="en-US" sz="4000">
+                <a:solidFill>
+                  <a:schemeClr val="bg1"/>
+                </a:solidFill>
+                <a:latin typeface="Avenir Medium" panose="02000503020000020003" pitchFamily="2" charset="0"/>
+                <a:ea typeface="Bodoni Ornaments" pitchFamily="2" charset="0"/>
+              </a:rPr>
+              <a:t>And </a:t>
+            </a:r>
+            <a:r>
+              <a:rPr lang="en-US" sz="4000" dirty="0">
+                <a:solidFill>
+                  <a:schemeClr val="bg1"/>
+                </a:solidFill>
+                <a:latin typeface="Avenir Medium" panose="02000503020000020003" pitchFamily="2" charset="0"/>
+                <a:ea typeface="Bodoni Ornaments" pitchFamily="2" charset="0"/>
+              </a:rPr>
+              <a:t>trembles at His voice</a:t>
+            </a:r>
+          </a:p>
+          <a:p>
+            <a:r>
+              <a:rPr lang="en-US" sz="4000" dirty="0">
+                <a:solidFill>
+                  <a:schemeClr val="bg1"/>
+                </a:solidFill>
+                <a:latin typeface="Avenir Medium" panose="02000503020000020003" pitchFamily="2" charset="0"/>
+                <a:ea typeface="Bodoni Ornaments" pitchFamily="2" charset="0"/>
+              </a:rPr>
+              <a:t>Trembles at His voice</a:t>
+            </a:r>
+          </a:p>
+        </p:txBody>
+      </p:sp>
+    </p:spTree>
+    <p:extLst>
+      <p:ext uri="{BB962C8B-B14F-4D97-AF65-F5344CB8AC3E}">
+        <p14:creationId xmlns:p14="http://schemas.microsoft.com/office/powerpoint/2010/main" val="2606874572"/>
+      </p:ext>
+    </p:extLst>
+  </p:cSld>
+  <p:clrMapOvr>
+    <a:masterClrMapping/>
+  </p:clrMapOvr>
+</p:sld>
+</file>
+
+<file path=ppt/slides/slide4.xml><?xml version="1.0" encoding="utf-8"?>
 <p:sld xmlns:a="http://schemas.openxmlformats.org/drawingml/2006/main" xmlns:r="http://schemas.openxmlformats.org/officeDocument/2006/relationships" xmlns:p="http://schemas.openxmlformats.org/presentationml/2006/main">
   <p:cSld>
     <p:bg>
@@ -3462,6 +3607,15 @@
           </a:bodyPr>
           <a:lstStyle/>
           <a:p>
+            <a:endParaRPr lang="en-US" sz="4000" dirty="0">
+              <a:solidFill>
+                <a:schemeClr val="bg1"/>
+              </a:solidFill>
+              <a:latin typeface="Avenir Medium" panose="02000503020000020003" pitchFamily="2" charset="0"/>
+              <a:ea typeface="Bodoni Ornaments" pitchFamily="2" charset="0"/>
+            </a:endParaRPr>
+          </a:p>
+          <a:p>
             <a:r>
               <a:rPr lang="en-US" sz="4000" dirty="0">
                 <a:solidFill>
@@ -3470,7 +3624,7 @@
                 <a:latin typeface="Avenir Medium" panose="02000503020000020003" pitchFamily="2" charset="0"/>
                 <a:ea typeface="Bodoni Ornaments" pitchFamily="2" charset="0"/>
               </a:rPr>
-              <a:t>How great is our God, sing with me</a:t>
+              <a:t>How great is our God, </a:t>
             </a:r>
           </a:p>
           <a:p>
@@ -3482,7 +3636,7 @@
                 <a:latin typeface="Avenir Medium" panose="02000503020000020003" pitchFamily="2" charset="0"/>
                 <a:ea typeface="Bodoni Ornaments" pitchFamily="2" charset="0"/>
               </a:rPr>
-              <a:t>How great is our God, and all will see</a:t>
+              <a:t>sing with me</a:t>
             </a:r>
           </a:p>
           <a:p>
@@ -3494,7 +3648,43 @@
                 <a:latin typeface="Avenir Medium" panose="02000503020000020003" pitchFamily="2" charset="0"/>
                 <a:ea typeface="Bodoni Ornaments" pitchFamily="2" charset="0"/>
               </a:rPr>
-              <a:t>How great, how great is our God</a:t>
+              <a:t>How great is our God, </a:t>
+            </a:r>
+          </a:p>
+          <a:p>
+            <a:r>
+              <a:rPr lang="en-US" sz="4000" dirty="0">
+                <a:solidFill>
+                  <a:schemeClr val="bg1"/>
+                </a:solidFill>
+                <a:latin typeface="Avenir Medium" panose="02000503020000020003" pitchFamily="2" charset="0"/>
+                <a:ea typeface="Bodoni Ornaments" pitchFamily="2" charset="0"/>
+              </a:rPr>
+              <a:t>and all will see</a:t>
+            </a:r>
+          </a:p>
+          <a:p>
+            <a:r>
+              <a:rPr lang="en-US" sz="4000" dirty="0">
+                <a:solidFill>
+                  <a:schemeClr val="bg1"/>
+                </a:solidFill>
+                <a:latin typeface="Avenir Medium" panose="02000503020000020003" pitchFamily="2" charset="0"/>
+                <a:ea typeface="Bodoni Ornaments" pitchFamily="2" charset="0"/>
+              </a:rPr>
+              <a:t>How great, </a:t>
+            </a:r>
+          </a:p>
+          <a:p>
+            <a:r>
+              <a:rPr lang="en-US" sz="4000" dirty="0">
+                <a:solidFill>
+                  <a:schemeClr val="bg1"/>
+                </a:solidFill>
+                <a:latin typeface="Avenir Medium" panose="02000503020000020003" pitchFamily="2" charset="0"/>
+                <a:ea typeface="Bodoni Ornaments" pitchFamily="2" charset="0"/>
+              </a:rPr>
+              <a:t>how great is our God</a:t>
             </a:r>
           </a:p>
         </p:txBody>
@@ -3512,7 +3702,7 @@
 </p:sld>
 </file>
 
-<file path=ppt/slides/slide4.xml><?xml version="1.0" encoding="utf-8"?>
+<file path=ppt/slides/slide5.xml><?xml version="1.0" encoding="utf-8"?>
 <p:sld xmlns:a="http://schemas.openxmlformats.org/drawingml/2006/main" xmlns:r="http://schemas.openxmlformats.org/officeDocument/2006/relationships" xmlns:p="http://schemas.openxmlformats.org/presentationml/2006/main">
   <p:cSld>
     <p:bg>
@@ -3571,6 +3761,15 @@
           </a:bodyPr>
           <a:lstStyle/>
           <a:p>
+            <a:endParaRPr lang="en-US" sz="4000" dirty="0">
+              <a:solidFill>
+                <a:schemeClr val="bg1"/>
+              </a:solidFill>
+              <a:latin typeface="Avenir Medium" panose="02000503020000020003" pitchFamily="2" charset="0"/>
+              <a:ea typeface="Bodoni Ornaments" pitchFamily="2" charset="0"/>
+            </a:endParaRPr>
+          </a:p>
+          <a:p>
             <a:r>
               <a:rPr lang="en-US" sz="4000" dirty="0">
                 <a:solidFill>
@@ -3616,54 +3815,6 @@
                 <a:ea typeface="Bodoni Ornaments" pitchFamily="2" charset="0"/>
               </a:rPr>
               <a:t>Beginning and the end</a:t>
-            </a:r>
-          </a:p>
-          <a:p>
-            <a:r>
-              <a:rPr lang="en-US" sz="4000" dirty="0">
-                <a:solidFill>
-                  <a:schemeClr val="bg1"/>
-                </a:solidFill>
-                <a:latin typeface="Avenir Medium" panose="02000503020000020003" pitchFamily="2" charset="0"/>
-                <a:ea typeface="Bodoni Ornaments" pitchFamily="2" charset="0"/>
-              </a:rPr>
-              <a:t>The Godhead Three in One</a:t>
-            </a:r>
-          </a:p>
-          <a:p>
-            <a:r>
-              <a:rPr lang="en-US" sz="4000" dirty="0">
-                <a:solidFill>
-                  <a:schemeClr val="bg1"/>
-                </a:solidFill>
-                <a:latin typeface="Avenir Medium" panose="02000503020000020003" pitchFamily="2" charset="0"/>
-                <a:ea typeface="Bodoni Ornaments" pitchFamily="2" charset="0"/>
-              </a:rPr>
-              <a:t>Father Spirit Son</a:t>
-            </a:r>
-          </a:p>
-          <a:p>
-            <a:r>
-              <a:rPr lang="en-US" sz="4000" dirty="0">
-                <a:solidFill>
-                  <a:schemeClr val="bg1"/>
-                </a:solidFill>
-                <a:latin typeface="Avenir Medium" panose="02000503020000020003" pitchFamily="2" charset="0"/>
-                <a:ea typeface="Bodoni Ornaments" pitchFamily="2" charset="0"/>
-              </a:rPr>
-              <a:t>The Lion and the Lamb</a:t>
-            </a:r>
-          </a:p>
-          <a:p>
-            <a:r>
-              <a:rPr lang="en-US" sz="4000" dirty="0">
-                <a:solidFill>
-                  <a:schemeClr val="bg1"/>
-                </a:solidFill>
-                <a:latin typeface="Avenir Medium" panose="02000503020000020003" pitchFamily="2" charset="0"/>
-                <a:ea typeface="Bodoni Ornaments" pitchFamily="2" charset="0"/>
-              </a:rPr>
-              <a:t>The Lion and the Lamb</a:t>
             </a:r>
           </a:p>
         </p:txBody>
@@ -3681,7 +3832,137 @@
 </p:sld>
 </file>
 
-<file path=ppt/slides/slide5.xml><?xml version="1.0" encoding="utf-8"?>
+<file path=ppt/slides/slide6.xml><?xml version="1.0" encoding="utf-8"?>
+<p:sld xmlns:a="http://schemas.openxmlformats.org/drawingml/2006/main" xmlns:r="http://schemas.openxmlformats.org/officeDocument/2006/relationships" xmlns:p="http://schemas.openxmlformats.org/presentationml/2006/main">
+  <p:cSld>
+    <p:bg>
+      <p:bgPr>
+        <a:solidFill>
+          <a:schemeClr val="tx1"/>
+        </a:solidFill>
+        <a:effectLst/>
+      </p:bgPr>
+    </p:bg>
+    <p:spTree>
+      <p:nvGrpSpPr>
+        <p:cNvPr id="1" name="">
+          <a:extLst>
+            <a:ext uri="{FF2B5EF4-FFF2-40B4-BE49-F238E27FC236}">
+              <a16:creationId xmlns:a16="http://schemas.microsoft.com/office/drawing/2014/main" id="{FF1BC40A-771C-B3EC-CBD3-9C9893E65513}"/>
+            </a:ext>
+          </a:extLst>
+        </p:cNvPr>
+        <p:cNvGrpSpPr/>
+        <p:nvPr/>
+      </p:nvGrpSpPr>
+      <p:grpSpPr>
+        <a:xfrm>
+          <a:off x="0" y="0"/>
+          <a:ext cx="0" cy="0"/>
+          <a:chOff x="0" y="0"/>
+          <a:chExt cx="0" cy="0"/>
+        </a:xfrm>
+      </p:grpSpPr>
+      <p:sp>
+        <p:nvSpPr>
+          <p:cNvPr id="3" name="Subtitle 2">
+            <a:extLst>
+              <a:ext uri="{FF2B5EF4-FFF2-40B4-BE49-F238E27FC236}">
+                <a16:creationId xmlns:a16="http://schemas.microsoft.com/office/drawing/2014/main" id="{65A380D5-292A-BC7C-23D6-50F16723F00A}"/>
+              </a:ext>
+            </a:extLst>
+          </p:cNvPr>
+          <p:cNvSpPr>
+            <a:spLocks noGrp="1"/>
+          </p:cNvSpPr>
+          <p:nvPr>
+            <p:ph type="subTitle" idx="1"/>
+          </p:nvPr>
+        </p:nvSpPr>
+        <p:spPr>
+          <a:xfrm>
+            <a:off x="144379" y="228600"/>
+            <a:ext cx="8903369" cy="6431280"/>
+          </a:xfrm>
+        </p:spPr>
+        <p:txBody>
+          <a:bodyPr>
+            <a:noAutofit/>
+          </a:bodyPr>
+          <a:lstStyle/>
+          <a:p>
+            <a:endParaRPr lang="en-US" sz="4000" dirty="0">
+              <a:solidFill>
+                <a:schemeClr val="bg1"/>
+              </a:solidFill>
+              <a:latin typeface="Avenir Medium" panose="02000503020000020003" pitchFamily="2" charset="0"/>
+              <a:ea typeface="Bodoni Ornaments" pitchFamily="2" charset="0"/>
+            </a:endParaRPr>
+          </a:p>
+          <a:p>
+            <a:r>
+              <a:rPr lang="en-US" sz="4000" dirty="0">
+                <a:solidFill>
+                  <a:schemeClr val="bg1"/>
+                </a:solidFill>
+                <a:latin typeface="Avenir Medium" panose="02000503020000020003" pitchFamily="2" charset="0"/>
+                <a:ea typeface="Bodoni Ornaments" pitchFamily="2" charset="0"/>
+              </a:rPr>
+              <a:t>The Godhead Three in One</a:t>
+            </a:r>
+          </a:p>
+          <a:p>
+            <a:r>
+              <a:rPr lang="en-US" sz="4000" dirty="0">
+                <a:solidFill>
+                  <a:schemeClr val="bg1"/>
+                </a:solidFill>
+                <a:latin typeface="Avenir Medium" panose="02000503020000020003" pitchFamily="2" charset="0"/>
+                <a:ea typeface="Bodoni Ornaments" pitchFamily="2" charset="0"/>
+              </a:rPr>
+              <a:t>Father Spirit Son</a:t>
+            </a:r>
+          </a:p>
+          <a:p>
+            <a:r>
+              <a:rPr lang="en-US" sz="4000" dirty="0">
+                <a:solidFill>
+                  <a:schemeClr val="bg1"/>
+                </a:solidFill>
+                <a:latin typeface="Avenir Medium" panose="02000503020000020003" pitchFamily="2" charset="0"/>
+                <a:ea typeface="Bodoni Ornaments" pitchFamily="2" charset="0"/>
+              </a:rPr>
+              <a:t>The Lion and the Lamb</a:t>
+            </a:r>
+          </a:p>
+          <a:p>
+            <a:r>
+              <a:rPr lang="en-US" sz="4000" dirty="0">
+                <a:solidFill>
+                  <a:schemeClr val="bg1"/>
+                </a:solidFill>
+                <a:latin typeface="Avenir Medium" panose="02000503020000020003" pitchFamily="2" charset="0"/>
+                <a:ea typeface="Bodoni Ornaments" pitchFamily="2" charset="0"/>
+              </a:rPr>
+              <a:t>The Lion and the Lamb</a:t>
+            </a:r>
+          </a:p>
+        </p:txBody>
+      </p:sp>
+    </p:spTree>
+    <p:extLst>
+      <p:ext uri="{BB962C8B-B14F-4D97-AF65-F5344CB8AC3E}">
+        <p14:creationId xmlns:p14="http://schemas.microsoft.com/office/powerpoint/2010/main" val="8088466"/>
+      </p:ext>
+    </p:extLst>
+  </p:cSld>
+  <p:clrMapOvr>
+    <a:masterClrMapping/>
+  </p:clrMapOvr>
+</p:sld>
+</file>
+
+<file path=ppt/slides/slide7.xml><?xml version="1.0" encoding="utf-8"?>
 <p:sld xmlns:a="http://schemas.openxmlformats.org/drawingml/2006/main" xmlns:r="http://schemas.openxmlformats.org/officeDocument/2006/relationships" xmlns:p="http://schemas.openxmlformats.org/presentationml/2006/main">
   <p:cSld>
     <p:bg>
@@ -3740,6 +4021,15 @@
           </a:bodyPr>
           <a:lstStyle/>
           <a:p>
+            <a:endParaRPr lang="en-US" sz="4000" dirty="0">
+              <a:solidFill>
+                <a:schemeClr val="bg1"/>
+              </a:solidFill>
+              <a:latin typeface="Avenir Medium" panose="02000503020000020003" pitchFamily="2" charset="0"/>
+              <a:ea typeface="Bodoni Ornaments" pitchFamily="2" charset="0"/>
+            </a:endParaRPr>
+          </a:p>
+          <a:p>
             <a:r>
               <a:rPr lang="en-US" sz="4000" dirty="0">
                 <a:solidFill>
@@ -3748,7 +4038,7 @@
                 <a:latin typeface="Avenir Medium" panose="02000503020000020003" pitchFamily="2" charset="0"/>
                 <a:ea typeface="Bodoni Ornaments" pitchFamily="2" charset="0"/>
               </a:rPr>
-              <a:t>How great is our God, sing with me</a:t>
+              <a:t>How great is our God, </a:t>
             </a:r>
           </a:p>
           <a:p>
@@ -3760,7 +4050,7 @@
                 <a:latin typeface="Avenir Medium" panose="02000503020000020003" pitchFamily="2" charset="0"/>
                 <a:ea typeface="Bodoni Ornaments" pitchFamily="2" charset="0"/>
               </a:rPr>
-              <a:t>How great is our God, and all will see</a:t>
+              <a:t>sing with me</a:t>
             </a:r>
           </a:p>
           <a:p>
@@ -3772,7 +4062,43 @@
                 <a:latin typeface="Avenir Medium" panose="02000503020000020003" pitchFamily="2" charset="0"/>
                 <a:ea typeface="Bodoni Ornaments" pitchFamily="2" charset="0"/>
               </a:rPr>
-              <a:t>How great, how great is our God</a:t>
+              <a:t>How great is our God, </a:t>
+            </a:r>
+          </a:p>
+          <a:p>
+            <a:r>
+              <a:rPr lang="en-US" sz="4000" dirty="0">
+                <a:solidFill>
+                  <a:schemeClr val="bg1"/>
+                </a:solidFill>
+                <a:latin typeface="Avenir Medium" panose="02000503020000020003" pitchFamily="2" charset="0"/>
+                <a:ea typeface="Bodoni Ornaments" pitchFamily="2" charset="0"/>
+              </a:rPr>
+              <a:t>and all will see</a:t>
+            </a:r>
+          </a:p>
+          <a:p>
+            <a:r>
+              <a:rPr lang="en-US" sz="4000" dirty="0">
+                <a:solidFill>
+                  <a:schemeClr val="bg1"/>
+                </a:solidFill>
+                <a:latin typeface="Avenir Medium" panose="02000503020000020003" pitchFamily="2" charset="0"/>
+                <a:ea typeface="Bodoni Ornaments" pitchFamily="2" charset="0"/>
+              </a:rPr>
+              <a:t>How great, </a:t>
+            </a:r>
+          </a:p>
+          <a:p>
+            <a:r>
+              <a:rPr lang="en-US" sz="4000" dirty="0">
+                <a:solidFill>
+                  <a:schemeClr val="bg1"/>
+                </a:solidFill>
+                <a:latin typeface="Avenir Medium" panose="02000503020000020003" pitchFamily="2" charset="0"/>
+                <a:ea typeface="Bodoni Ornaments" pitchFamily="2" charset="0"/>
+              </a:rPr>
+              <a:t>how great is our God</a:t>
             </a:r>
           </a:p>
         </p:txBody>

--- a/How Great is Our God.pptx
+++ b/How Great is Our God.pptx
@@ -6,12 +6,14 @@
   </p:sldMasterIdLst>
   <p:sldIdLst>
     <p:sldId id="274" r:id="rId2"/>
-    <p:sldId id="280" r:id="rId3"/>
-    <p:sldId id="284" r:id="rId4"/>
+    <p:sldId id="330" r:id="rId3"/>
+    <p:sldId id="331" r:id="rId4"/>
     <p:sldId id="279" r:id="rId5"/>
-    <p:sldId id="281" r:id="rId6"/>
-    <p:sldId id="283" r:id="rId7"/>
-    <p:sldId id="282" r:id="rId8"/>
+    <p:sldId id="354" r:id="rId6"/>
+    <p:sldId id="332" r:id="rId7"/>
+    <p:sldId id="333" r:id="rId8"/>
+    <p:sldId id="355" r:id="rId9"/>
+    <p:sldId id="356" r:id="rId10"/>
   </p:sldIdLst>
   <p:sldSz cx="9144000" cy="6858000" type="screen4x3"/>
   <p:notesSz cx="6858000" cy="9144000"/>
@@ -249,7 +251,7 @@
           <a:p>
             <a:fld id="{E759A0DE-F190-5444-87AC-4719D5F20D15}" type="datetimeFigureOut">
               <a:rPr lang="en-US" smtClean="0"/>
-              <a:t>9/24/26</a:t>
+              <a:t>10/8/26</a:t>
             </a:fld>
             <a:endParaRPr lang="en-US"/>
           </a:p>
@@ -419,7 +421,7 @@
           <a:p>
             <a:fld id="{E759A0DE-F190-5444-87AC-4719D5F20D15}" type="datetimeFigureOut">
               <a:rPr lang="en-US" smtClean="0"/>
-              <a:t>9/24/26</a:t>
+              <a:t>10/8/26</a:t>
             </a:fld>
             <a:endParaRPr lang="en-US"/>
           </a:p>
@@ -599,7 +601,7 @@
           <a:p>
             <a:fld id="{E759A0DE-F190-5444-87AC-4719D5F20D15}" type="datetimeFigureOut">
               <a:rPr lang="en-US" smtClean="0"/>
-              <a:t>9/24/26</a:t>
+              <a:t>10/8/26</a:t>
             </a:fld>
             <a:endParaRPr lang="en-US"/>
           </a:p>
@@ -769,7 +771,7 @@
           <a:p>
             <a:fld id="{E759A0DE-F190-5444-87AC-4719D5F20D15}" type="datetimeFigureOut">
               <a:rPr lang="en-US" smtClean="0"/>
-              <a:t>9/24/26</a:t>
+              <a:t>10/8/26</a:t>
             </a:fld>
             <a:endParaRPr lang="en-US"/>
           </a:p>
@@ -1015,7 +1017,7 @@
           <a:p>
             <a:fld id="{E759A0DE-F190-5444-87AC-4719D5F20D15}" type="datetimeFigureOut">
               <a:rPr lang="en-US" smtClean="0"/>
-              <a:t>9/24/26</a:t>
+              <a:t>10/8/26</a:t>
             </a:fld>
             <a:endParaRPr lang="en-US"/>
           </a:p>
@@ -1247,7 +1249,7 @@
           <a:p>
             <a:fld id="{E759A0DE-F190-5444-87AC-4719D5F20D15}" type="datetimeFigureOut">
               <a:rPr lang="en-US" smtClean="0"/>
-              <a:t>9/24/26</a:t>
+              <a:t>10/8/26</a:t>
             </a:fld>
             <a:endParaRPr lang="en-US"/>
           </a:p>
@@ -1614,7 +1616,7 @@
           <a:p>
             <a:fld id="{E759A0DE-F190-5444-87AC-4719D5F20D15}" type="datetimeFigureOut">
               <a:rPr lang="en-US" smtClean="0"/>
-              <a:t>9/24/26</a:t>
+              <a:t>10/8/26</a:t>
             </a:fld>
             <a:endParaRPr lang="en-US"/>
           </a:p>
@@ -1732,7 +1734,7 @@
           <a:p>
             <a:fld id="{E759A0DE-F190-5444-87AC-4719D5F20D15}" type="datetimeFigureOut">
               <a:rPr lang="en-US" smtClean="0"/>
-              <a:t>9/24/26</a:t>
+              <a:t>10/8/26</a:t>
             </a:fld>
             <a:endParaRPr lang="en-US"/>
           </a:p>
@@ -1827,7 +1829,7 @@
           <a:p>
             <a:fld id="{E759A0DE-F190-5444-87AC-4719D5F20D15}" type="datetimeFigureOut">
               <a:rPr lang="en-US" smtClean="0"/>
-              <a:t>9/24/26</a:t>
+              <a:t>10/8/26</a:t>
             </a:fld>
             <a:endParaRPr lang="en-US"/>
           </a:p>
@@ -2104,7 +2106,7 @@
           <a:p>
             <a:fld id="{E759A0DE-F190-5444-87AC-4719D5F20D15}" type="datetimeFigureOut">
               <a:rPr lang="en-US" smtClean="0"/>
-              <a:t>9/24/26</a:t>
+              <a:t>10/8/26</a:t>
             </a:fld>
             <a:endParaRPr lang="en-US"/>
           </a:p>
@@ -2361,7 +2363,7 @@
           <a:p>
             <a:fld id="{E759A0DE-F190-5444-87AC-4719D5F20D15}" type="datetimeFigureOut">
               <a:rPr lang="en-US" smtClean="0"/>
-              <a:t>9/24/26</a:t>
+              <a:t>10/8/26</a:t>
             </a:fld>
             <a:endParaRPr lang="en-US"/>
           </a:p>
@@ -2574,7 +2576,7 @@
           <a:p>
             <a:fld id="{E759A0DE-F190-5444-87AC-4719D5F20D15}" type="datetimeFigureOut">
               <a:rPr lang="en-US" smtClean="0"/>
-              <a:t>9/24/26</a:t>
+              <a:t>10/8/26</a:t>
             </a:fld>
             <a:endParaRPr lang="en-US"/>
           </a:p>
@@ -3319,7 +3321,7 @@
           </a:bodyPr>
           <a:lstStyle/>
           <a:p>
-            <a:endParaRPr lang="en-US" sz="4000" dirty="0">
+            <a:endParaRPr lang="en-US" sz="5400" dirty="0">
               <a:solidFill>
                 <a:schemeClr val="bg1"/>
               </a:solidFill>
@@ -3329,7 +3331,7 @@
           </a:p>
           <a:p>
             <a:r>
-              <a:rPr lang="en-US" sz="4000" dirty="0">
+              <a:rPr lang="en-US" sz="5400" dirty="0">
                 <a:solidFill>
                   <a:schemeClr val="bg1"/>
                 </a:solidFill>
@@ -3341,7 +3343,7 @@
           </a:p>
           <a:p>
             <a:r>
-              <a:rPr lang="en-US" sz="4000" dirty="0">
+              <a:rPr lang="en-US" sz="5400" dirty="0">
                 <a:solidFill>
                   <a:schemeClr val="bg1"/>
                 </a:solidFill>
@@ -3352,7 +3354,7 @@
             </a:r>
           </a:p>
           <a:p>
-            <a:endParaRPr lang="en-US" sz="4000" dirty="0">
+            <a:endParaRPr lang="en-US" sz="5400" dirty="0">
               <a:solidFill>
                 <a:schemeClr val="bg1"/>
               </a:solidFill>
@@ -3362,7 +3364,7 @@
           </a:p>
           <a:p>
             <a:r>
-              <a:rPr lang="en-US" sz="4000" dirty="0">
+              <a:rPr lang="en-US" sz="5400" dirty="0">
                 <a:solidFill>
                   <a:schemeClr val="bg1"/>
                 </a:solidFill>
@@ -3374,7 +3376,7 @@
           </a:p>
           <a:p>
             <a:r>
-              <a:rPr lang="en-US" sz="4000" dirty="0">
+              <a:rPr lang="en-US" sz="5400" dirty="0">
                 <a:solidFill>
                   <a:schemeClr val="bg1"/>
                 </a:solidFill>
@@ -3389,7 +3391,7 @@
     </p:spTree>
     <p:extLst>
       <p:ext uri="{BB962C8B-B14F-4D97-AF65-F5344CB8AC3E}">
-        <p14:creationId xmlns:p14="http://schemas.microsoft.com/office/powerpoint/2010/main" val="2164526557"/>
+        <p14:creationId xmlns:p14="http://schemas.microsoft.com/office/powerpoint/2010/main" val="1342514676"/>
       </p:ext>
     </p:extLst>
   </p:cSld>
@@ -3458,7 +3460,7 @@
           </a:bodyPr>
           <a:lstStyle/>
           <a:p>
-            <a:endParaRPr lang="en-US" sz="4000" dirty="0">
+            <a:endParaRPr lang="en-US" sz="5400" dirty="0">
               <a:solidFill>
                 <a:schemeClr val="bg1"/>
               </a:solidFill>
@@ -3468,7 +3470,7 @@
           </a:p>
           <a:p>
             <a:r>
-              <a:rPr lang="en-US" sz="4000" dirty="0">
+              <a:rPr lang="en-US" sz="5400" dirty="0">
                 <a:solidFill>
                   <a:schemeClr val="bg1"/>
                 </a:solidFill>
@@ -3480,7 +3482,7 @@
           </a:p>
           <a:p>
             <a:r>
-              <a:rPr lang="en-US" sz="4000" dirty="0">
+              <a:rPr lang="en-US" sz="5400" dirty="0">
                 <a:solidFill>
                   <a:schemeClr val="bg1"/>
                 </a:solidFill>
@@ -3491,7 +3493,7 @@
             </a:r>
           </a:p>
           <a:p>
-            <a:endParaRPr lang="en-US" sz="4000">
+            <a:endParaRPr lang="en-US" sz="5400" dirty="0">
               <a:solidFill>
                 <a:schemeClr val="bg1"/>
               </a:solidFill>
@@ -3501,29 +3503,19 @@
           </a:p>
           <a:p>
             <a:r>
-              <a:rPr lang="en-US" sz="4000">
+              <a:rPr lang="en-US" sz="5400" dirty="0">
                 <a:solidFill>
                   <a:schemeClr val="bg1"/>
                 </a:solidFill>
                 <a:latin typeface="Avenir Medium" panose="02000503020000020003" pitchFamily="2" charset="0"/>
                 <a:ea typeface="Bodoni Ornaments" pitchFamily="2" charset="0"/>
               </a:rPr>
-              <a:t>And </a:t>
-            </a:r>
-            <a:r>
-              <a:rPr lang="en-US" sz="4000" dirty="0">
-                <a:solidFill>
-                  <a:schemeClr val="bg1"/>
-                </a:solidFill>
-                <a:latin typeface="Avenir Medium" panose="02000503020000020003" pitchFamily="2" charset="0"/>
-                <a:ea typeface="Bodoni Ornaments" pitchFamily="2" charset="0"/>
-              </a:rPr>
-              <a:t>trembles at His voice</a:t>
-            </a:r>
-          </a:p>
-          <a:p>
-            <a:r>
-              <a:rPr lang="en-US" sz="4000" dirty="0">
+              <a:t>And trembles at His voice</a:t>
+            </a:r>
+          </a:p>
+          <a:p>
+            <a:r>
+              <a:rPr lang="en-US" sz="5400" dirty="0">
                 <a:solidFill>
                   <a:schemeClr val="bg1"/>
                 </a:solidFill>
@@ -3554,7 +3546,9 @@
     <p:bg>
       <p:bgPr>
         <a:solidFill>
-          <a:schemeClr val="tx1"/>
+          <a:schemeClr val="bg2">
+            <a:lumMod val="10000"/>
+          </a:schemeClr>
         </a:solidFill>
         <a:effectLst/>
       </p:bgPr>
@@ -3598,7 +3592,7 @@
         <p:spPr>
           <a:xfrm>
             <a:off x="144379" y="228600"/>
-            <a:ext cx="8903369" cy="6431280"/>
+            <a:ext cx="8716285" cy="6431280"/>
           </a:xfrm>
         </p:spPr>
         <p:txBody>
@@ -3607,7 +3601,7 @@
           </a:bodyPr>
           <a:lstStyle/>
           <a:p>
-            <a:endParaRPr lang="en-US" sz="4000" dirty="0">
+            <a:endParaRPr lang="en-US" sz="5400" dirty="0">
               <a:solidFill>
                 <a:schemeClr val="bg1"/>
               </a:solidFill>
@@ -3617,7 +3611,7 @@
           </a:p>
           <a:p>
             <a:r>
-              <a:rPr lang="en-US" sz="4000" dirty="0">
+              <a:rPr lang="en-US" sz="5400" dirty="0">
                 <a:solidFill>
                   <a:schemeClr val="bg1"/>
                 </a:solidFill>
@@ -3629,7 +3623,7 @@
           </a:p>
           <a:p>
             <a:r>
-              <a:rPr lang="en-US" sz="4000" dirty="0">
+              <a:rPr lang="en-US" sz="5400" dirty="0">
                 <a:solidFill>
                   <a:schemeClr val="bg1"/>
                 </a:solidFill>
@@ -3641,7 +3635,7 @@
           </a:p>
           <a:p>
             <a:r>
-              <a:rPr lang="en-US" sz="4000" dirty="0">
+              <a:rPr lang="en-US" sz="5400" dirty="0">
                 <a:solidFill>
                   <a:schemeClr val="bg1"/>
                 </a:solidFill>
@@ -3649,42 +3643,6 @@
                 <a:ea typeface="Bodoni Ornaments" pitchFamily="2" charset="0"/>
               </a:rPr>
               <a:t>How great is our God, </a:t>
-            </a:r>
-          </a:p>
-          <a:p>
-            <a:r>
-              <a:rPr lang="en-US" sz="4000" dirty="0">
-                <a:solidFill>
-                  <a:schemeClr val="bg1"/>
-                </a:solidFill>
-                <a:latin typeface="Avenir Medium" panose="02000503020000020003" pitchFamily="2" charset="0"/>
-                <a:ea typeface="Bodoni Ornaments" pitchFamily="2" charset="0"/>
-              </a:rPr>
-              <a:t>and all will see</a:t>
-            </a:r>
-          </a:p>
-          <a:p>
-            <a:r>
-              <a:rPr lang="en-US" sz="4000" dirty="0">
-                <a:solidFill>
-                  <a:schemeClr val="bg1"/>
-                </a:solidFill>
-                <a:latin typeface="Avenir Medium" panose="02000503020000020003" pitchFamily="2" charset="0"/>
-                <a:ea typeface="Bodoni Ornaments" pitchFamily="2" charset="0"/>
-              </a:rPr>
-              <a:t>How great, </a:t>
-            </a:r>
-          </a:p>
-          <a:p>
-            <a:r>
-              <a:rPr lang="en-US" sz="4000" dirty="0">
-                <a:solidFill>
-                  <a:schemeClr val="bg1"/>
-                </a:solidFill>
-                <a:latin typeface="Avenir Medium" panose="02000503020000020003" pitchFamily="2" charset="0"/>
-                <a:ea typeface="Bodoni Ornaments" pitchFamily="2" charset="0"/>
-              </a:rPr>
-              <a:t>how great is our God</a:t>
             </a:r>
           </a:p>
         </p:txBody>
@@ -3703,6 +3661,138 @@
 </file>
 
 <file path=ppt/slides/slide5.xml><?xml version="1.0" encoding="utf-8"?>
+<p:sld xmlns:a="http://schemas.openxmlformats.org/drawingml/2006/main" xmlns:r="http://schemas.openxmlformats.org/officeDocument/2006/relationships" xmlns:p="http://schemas.openxmlformats.org/presentationml/2006/main">
+  <p:cSld>
+    <p:bg>
+      <p:bgPr>
+        <a:solidFill>
+          <a:schemeClr val="bg2">
+            <a:lumMod val="10000"/>
+          </a:schemeClr>
+        </a:solidFill>
+        <a:effectLst/>
+      </p:bgPr>
+    </p:bg>
+    <p:spTree>
+      <p:nvGrpSpPr>
+        <p:cNvPr id="1" name="">
+          <a:extLst>
+            <a:ext uri="{FF2B5EF4-FFF2-40B4-BE49-F238E27FC236}">
+              <a16:creationId xmlns:a16="http://schemas.microsoft.com/office/drawing/2014/main" id="{BF986EF5-30A6-2D8F-21AA-3E6E75DB09D9}"/>
+            </a:ext>
+          </a:extLst>
+        </p:cNvPr>
+        <p:cNvGrpSpPr/>
+        <p:nvPr/>
+      </p:nvGrpSpPr>
+      <p:grpSpPr>
+        <a:xfrm>
+          <a:off x="0" y="0"/>
+          <a:ext cx="0" cy="0"/>
+          <a:chOff x="0" y="0"/>
+          <a:chExt cx="0" cy="0"/>
+        </a:xfrm>
+      </p:grpSpPr>
+      <p:sp>
+        <p:nvSpPr>
+          <p:cNvPr id="3" name="Subtitle 2">
+            <a:extLst>
+              <a:ext uri="{FF2B5EF4-FFF2-40B4-BE49-F238E27FC236}">
+                <a16:creationId xmlns:a16="http://schemas.microsoft.com/office/drawing/2014/main" id="{CF4AC2CA-4F17-FE10-40A4-F76A3489A2E8}"/>
+              </a:ext>
+            </a:extLst>
+          </p:cNvPr>
+          <p:cNvSpPr>
+            <a:spLocks noGrp="1"/>
+          </p:cNvSpPr>
+          <p:nvPr>
+            <p:ph type="subTitle" idx="1"/>
+          </p:nvPr>
+        </p:nvSpPr>
+        <p:spPr>
+          <a:xfrm>
+            <a:off x="144379" y="228600"/>
+            <a:ext cx="8716285" cy="6431280"/>
+          </a:xfrm>
+        </p:spPr>
+        <p:txBody>
+          <a:bodyPr>
+            <a:noAutofit/>
+          </a:bodyPr>
+          <a:lstStyle/>
+          <a:p>
+            <a:endParaRPr lang="en-US" sz="5400" dirty="0">
+              <a:solidFill>
+                <a:schemeClr val="bg1"/>
+              </a:solidFill>
+              <a:latin typeface="Avenir Medium" panose="02000503020000020003" pitchFamily="2" charset="0"/>
+              <a:ea typeface="Bodoni Ornaments" pitchFamily="2" charset="0"/>
+            </a:endParaRPr>
+          </a:p>
+          <a:p>
+            <a:r>
+              <a:rPr lang="en-US" sz="5400" dirty="0">
+                <a:solidFill>
+                  <a:schemeClr val="bg1"/>
+                </a:solidFill>
+                <a:latin typeface="Avenir Medium" panose="02000503020000020003" pitchFamily="2" charset="0"/>
+                <a:ea typeface="Bodoni Ornaments" pitchFamily="2" charset="0"/>
+              </a:rPr>
+              <a:t>  </a:t>
+            </a:r>
+          </a:p>
+          <a:p>
+            <a:r>
+              <a:rPr lang="en-US" sz="5400" dirty="0">
+                <a:solidFill>
+                  <a:schemeClr val="bg1"/>
+                </a:solidFill>
+                <a:latin typeface="Avenir Medium" panose="02000503020000020003" pitchFamily="2" charset="0"/>
+                <a:ea typeface="Bodoni Ornaments" pitchFamily="2" charset="0"/>
+              </a:rPr>
+              <a:t>and all will see</a:t>
+            </a:r>
+          </a:p>
+          <a:p>
+            <a:r>
+              <a:rPr lang="en-US" sz="5400" dirty="0">
+                <a:solidFill>
+                  <a:schemeClr val="bg1"/>
+                </a:solidFill>
+                <a:latin typeface="Avenir Medium" panose="02000503020000020003" pitchFamily="2" charset="0"/>
+                <a:ea typeface="Bodoni Ornaments" pitchFamily="2" charset="0"/>
+              </a:rPr>
+              <a:t>How great, </a:t>
+            </a:r>
+          </a:p>
+          <a:p>
+            <a:r>
+              <a:rPr lang="en-US" sz="5400" dirty="0">
+                <a:solidFill>
+                  <a:schemeClr val="bg1"/>
+                </a:solidFill>
+                <a:latin typeface="Avenir Medium" panose="02000503020000020003" pitchFamily="2" charset="0"/>
+                <a:ea typeface="Bodoni Ornaments" pitchFamily="2" charset="0"/>
+              </a:rPr>
+              <a:t>how great is our God</a:t>
+            </a:r>
+          </a:p>
+        </p:txBody>
+      </p:sp>
+    </p:spTree>
+    <p:extLst>
+      <p:ext uri="{BB962C8B-B14F-4D97-AF65-F5344CB8AC3E}">
+        <p14:creationId xmlns:p14="http://schemas.microsoft.com/office/powerpoint/2010/main" val="3177438090"/>
+      </p:ext>
+    </p:extLst>
+  </p:cSld>
+  <p:clrMapOvr>
+    <a:masterClrMapping/>
+  </p:clrMapOvr>
+</p:sld>
+</file>
+
+<file path=ppt/slides/slide6.xml><?xml version="1.0" encoding="utf-8"?>
 <p:sld xmlns:a="http://schemas.openxmlformats.org/drawingml/2006/main" xmlns:r="http://schemas.openxmlformats.org/officeDocument/2006/relationships" xmlns:p="http://schemas.openxmlformats.org/presentationml/2006/main">
   <p:cSld>
     <p:bg>
@@ -3761,7 +3851,7 @@
           </a:bodyPr>
           <a:lstStyle/>
           <a:p>
-            <a:endParaRPr lang="en-US" sz="4000" dirty="0">
+            <a:endParaRPr lang="en-US" sz="5400" dirty="0">
               <a:solidFill>
                 <a:schemeClr val="bg1"/>
               </a:solidFill>
@@ -3771,7 +3861,7 @@
           </a:p>
           <a:p>
             <a:r>
-              <a:rPr lang="en-US" sz="4000" dirty="0">
+              <a:rPr lang="en-US" sz="5400" dirty="0">
                 <a:solidFill>
                   <a:schemeClr val="bg1"/>
                 </a:solidFill>
@@ -3783,7 +3873,7 @@
           </a:p>
           <a:p>
             <a:r>
-              <a:rPr lang="en-US" sz="4000" dirty="0">
+              <a:rPr lang="en-US" sz="5400" dirty="0">
                 <a:solidFill>
                   <a:schemeClr val="bg1"/>
                 </a:solidFill>
@@ -3794,8 +3884,17 @@
             </a:r>
           </a:p>
           <a:p>
-            <a:r>
-              <a:rPr lang="en-US" sz="4000" dirty="0">
+            <a:endParaRPr lang="en-US" sz="5400" dirty="0">
+              <a:solidFill>
+                <a:schemeClr val="bg1"/>
+              </a:solidFill>
+              <a:latin typeface="Avenir Medium" panose="02000503020000020003" pitchFamily="2" charset="0"/>
+              <a:ea typeface="Bodoni Ornaments" pitchFamily="2" charset="0"/>
+            </a:endParaRPr>
+          </a:p>
+          <a:p>
+            <a:r>
+              <a:rPr lang="en-US" sz="5400" dirty="0">
                 <a:solidFill>
                   <a:schemeClr val="bg1"/>
                 </a:solidFill>
@@ -3807,7 +3906,7 @@
           </a:p>
           <a:p>
             <a:r>
-              <a:rPr lang="en-US" sz="4000" dirty="0">
+              <a:rPr lang="en-US" sz="5400" dirty="0">
                 <a:solidFill>
                   <a:schemeClr val="bg1"/>
                 </a:solidFill>
@@ -3832,7 +3931,7 @@
 </p:sld>
 </file>
 
-<file path=ppt/slides/slide6.xml><?xml version="1.0" encoding="utf-8"?>
+<file path=ppt/slides/slide7.xml><?xml version="1.0" encoding="utf-8"?>
 <p:sld xmlns:a="http://schemas.openxmlformats.org/drawingml/2006/main" xmlns:r="http://schemas.openxmlformats.org/officeDocument/2006/relationships" xmlns:p="http://schemas.openxmlformats.org/presentationml/2006/main">
   <p:cSld>
     <p:bg>
@@ -3891,7 +3990,7 @@
           </a:bodyPr>
           <a:lstStyle/>
           <a:p>
-            <a:endParaRPr lang="en-US" sz="4000" dirty="0">
+            <a:endParaRPr lang="en-US" sz="5400" dirty="0">
               <a:solidFill>
                 <a:schemeClr val="bg1"/>
               </a:solidFill>
@@ -3901,7 +4000,7 @@
           </a:p>
           <a:p>
             <a:r>
-              <a:rPr lang="en-US" sz="4000" dirty="0">
+              <a:rPr lang="en-US" sz="5400" dirty="0">
                 <a:solidFill>
                   <a:schemeClr val="bg1"/>
                 </a:solidFill>
@@ -3913,7 +4012,7 @@
           </a:p>
           <a:p>
             <a:r>
-              <a:rPr lang="en-US" sz="4000" dirty="0">
+              <a:rPr lang="en-US" sz="5400" dirty="0">
                 <a:solidFill>
                   <a:schemeClr val="bg1"/>
                 </a:solidFill>
@@ -3924,8 +4023,17 @@
             </a:r>
           </a:p>
           <a:p>
-            <a:r>
-              <a:rPr lang="en-US" sz="4000" dirty="0">
+            <a:endParaRPr lang="en-US" sz="5400" dirty="0">
+              <a:solidFill>
+                <a:schemeClr val="bg1"/>
+              </a:solidFill>
+              <a:latin typeface="Avenir Medium" panose="02000503020000020003" pitchFamily="2" charset="0"/>
+              <a:ea typeface="Bodoni Ornaments" pitchFamily="2" charset="0"/>
+            </a:endParaRPr>
+          </a:p>
+          <a:p>
+            <a:r>
+              <a:rPr lang="en-US" sz="5400" dirty="0">
                 <a:solidFill>
                   <a:schemeClr val="bg1"/>
                 </a:solidFill>
@@ -3937,7 +4045,7 @@
           </a:p>
           <a:p>
             <a:r>
-              <a:rPr lang="en-US" sz="4000" dirty="0">
+              <a:rPr lang="en-US" sz="5400" dirty="0">
                 <a:solidFill>
                   <a:schemeClr val="bg1"/>
                 </a:solidFill>
@@ -3962,13 +4070,15 @@
 </p:sld>
 </file>
 
-<file path=ppt/slides/slide7.xml><?xml version="1.0" encoding="utf-8"?>
+<file path=ppt/slides/slide8.xml><?xml version="1.0" encoding="utf-8"?>
 <p:sld xmlns:a="http://schemas.openxmlformats.org/drawingml/2006/main" xmlns:r="http://schemas.openxmlformats.org/officeDocument/2006/relationships" xmlns:p="http://schemas.openxmlformats.org/presentationml/2006/main">
   <p:cSld>
     <p:bg>
       <p:bgPr>
         <a:solidFill>
-          <a:schemeClr val="tx1"/>
+          <a:schemeClr val="bg2">
+            <a:lumMod val="10000"/>
+          </a:schemeClr>
         </a:solidFill>
         <a:effectLst/>
       </p:bgPr>
@@ -3978,7 +4088,7 @@
         <p:cNvPr id="1" name="">
           <a:extLst>
             <a:ext uri="{FF2B5EF4-FFF2-40B4-BE49-F238E27FC236}">
-              <a16:creationId xmlns:a16="http://schemas.microsoft.com/office/drawing/2014/main" id="{92E07371-FAA9-2FAD-311B-49D36E1E8335}"/>
+              <a16:creationId xmlns:a16="http://schemas.microsoft.com/office/drawing/2014/main" id="{9C431F24-B59A-EC3A-6ED9-0375A10FC3DB}"/>
             </a:ext>
           </a:extLst>
         </p:cNvPr>
@@ -3998,7 +4108,7 @@
           <p:cNvPr id="3" name="Subtitle 2">
             <a:extLst>
               <a:ext uri="{FF2B5EF4-FFF2-40B4-BE49-F238E27FC236}">
-                <a16:creationId xmlns:a16="http://schemas.microsoft.com/office/drawing/2014/main" id="{8F30F81D-515B-FE3E-3EEB-84A0303B1583}"/>
+                <a16:creationId xmlns:a16="http://schemas.microsoft.com/office/drawing/2014/main" id="{268E6D50-8BC8-F0C8-DB18-856E61CA4741}"/>
               </a:ext>
             </a:extLst>
           </p:cNvPr>
@@ -4012,7 +4122,7 @@
         <p:spPr>
           <a:xfrm>
             <a:off x="144379" y="228600"/>
-            <a:ext cx="8903369" cy="6431280"/>
+            <a:ext cx="8716285" cy="6431280"/>
           </a:xfrm>
         </p:spPr>
         <p:txBody>
@@ -4021,7 +4131,7 @@
           </a:bodyPr>
           <a:lstStyle/>
           <a:p>
-            <a:endParaRPr lang="en-US" sz="4000" dirty="0">
+            <a:endParaRPr lang="en-US" sz="5400" dirty="0">
               <a:solidFill>
                 <a:schemeClr val="bg1"/>
               </a:solidFill>
@@ -4031,7 +4141,7 @@
           </a:p>
           <a:p>
             <a:r>
-              <a:rPr lang="en-US" sz="4000" dirty="0">
+              <a:rPr lang="en-US" sz="5400" dirty="0">
                 <a:solidFill>
                   <a:schemeClr val="bg1"/>
                 </a:solidFill>
@@ -4043,7 +4153,7 @@
           </a:p>
           <a:p>
             <a:r>
-              <a:rPr lang="en-US" sz="4000" dirty="0">
+              <a:rPr lang="en-US" sz="5400" dirty="0">
                 <a:solidFill>
                   <a:schemeClr val="bg1"/>
                 </a:solidFill>
@@ -4055,7 +4165,7 @@
           </a:p>
           <a:p>
             <a:r>
-              <a:rPr lang="en-US" sz="4000" dirty="0">
+              <a:rPr lang="en-US" sz="5400" dirty="0">
                 <a:solidFill>
                   <a:schemeClr val="bg1"/>
                 </a:solidFill>
@@ -4065,9 +4175,105 @@
               <a:t>How great is our God, </a:t>
             </a:r>
           </a:p>
-          <a:p>
-            <a:r>
-              <a:rPr lang="en-US" sz="4000" dirty="0">
+        </p:txBody>
+      </p:sp>
+    </p:spTree>
+    <p:extLst>
+      <p:ext uri="{BB962C8B-B14F-4D97-AF65-F5344CB8AC3E}">
+        <p14:creationId xmlns:p14="http://schemas.microsoft.com/office/powerpoint/2010/main" val="4109822250"/>
+      </p:ext>
+    </p:extLst>
+  </p:cSld>
+  <p:clrMapOvr>
+    <a:masterClrMapping/>
+  </p:clrMapOvr>
+</p:sld>
+</file>
+
+<file path=ppt/slides/slide9.xml><?xml version="1.0" encoding="utf-8"?>
+<p:sld xmlns:a="http://schemas.openxmlformats.org/drawingml/2006/main" xmlns:r="http://schemas.openxmlformats.org/officeDocument/2006/relationships" xmlns:p="http://schemas.openxmlformats.org/presentationml/2006/main">
+  <p:cSld>
+    <p:bg>
+      <p:bgPr>
+        <a:solidFill>
+          <a:schemeClr val="bg2">
+            <a:lumMod val="10000"/>
+          </a:schemeClr>
+        </a:solidFill>
+        <a:effectLst/>
+      </p:bgPr>
+    </p:bg>
+    <p:spTree>
+      <p:nvGrpSpPr>
+        <p:cNvPr id="1" name="">
+          <a:extLst>
+            <a:ext uri="{FF2B5EF4-FFF2-40B4-BE49-F238E27FC236}">
+              <a16:creationId xmlns:a16="http://schemas.microsoft.com/office/drawing/2014/main" id="{40FC8BE5-C3F0-2BD7-3862-91B6254C4C0D}"/>
+            </a:ext>
+          </a:extLst>
+        </p:cNvPr>
+        <p:cNvGrpSpPr/>
+        <p:nvPr/>
+      </p:nvGrpSpPr>
+      <p:grpSpPr>
+        <a:xfrm>
+          <a:off x="0" y="0"/>
+          <a:ext cx="0" cy="0"/>
+          <a:chOff x="0" y="0"/>
+          <a:chExt cx="0" cy="0"/>
+        </a:xfrm>
+      </p:grpSpPr>
+      <p:sp>
+        <p:nvSpPr>
+          <p:cNvPr id="3" name="Subtitle 2">
+            <a:extLst>
+              <a:ext uri="{FF2B5EF4-FFF2-40B4-BE49-F238E27FC236}">
+                <a16:creationId xmlns:a16="http://schemas.microsoft.com/office/drawing/2014/main" id="{BDAF28F3-7B2C-3F01-053C-61A578ADA931}"/>
+              </a:ext>
+            </a:extLst>
+          </p:cNvPr>
+          <p:cNvSpPr>
+            <a:spLocks noGrp="1"/>
+          </p:cNvSpPr>
+          <p:nvPr>
+            <p:ph type="subTitle" idx="1"/>
+          </p:nvPr>
+        </p:nvSpPr>
+        <p:spPr>
+          <a:xfrm>
+            <a:off x="144379" y="228600"/>
+            <a:ext cx="8716285" cy="6431280"/>
+          </a:xfrm>
+        </p:spPr>
+        <p:txBody>
+          <a:bodyPr>
+            <a:noAutofit/>
+          </a:bodyPr>
+          <a:lstStyle/>
+          <a:p>
+            <a:endParaRPr lang="en-US" sz="5400" dirty="0">
+              <a:solidFill>
+                <a:schemeClr val="bg1"/>
+              </a:solidFill>
+              <a:latin typeface="Avenir Medium" panose="02000503020000020003" pitchFamily="2" charset="0"/>
+              <a:ea typeface="Bodoni Ornaments" pitchFamily="2" charset="0"/>
+            </a:endParaRPr>
+          </a:p>
+          <a:p>
+            <a:r>
+              <a:rPr lang="en-US" sz="5400" dirty="0">
+                <a:solidFill>
+                  <a:schemeClr val="bg1"/>
+                </a:solidFill>
+                <a:latin typeface="Avenir Medium" panose="02000503020000020003" pitchFamily="2" charset="0"/>
+                <a:ea typeface="Bodoni Ornaments" pitchFamily="2" charset="0"/>
+              </a:rPr>
+              <a:t>  </a:t>
+            </a:r>
+          </a:p>
+          <a:p>
+            <a:r>
+              <a:rPr lang="en-US" sz="5400" dirty="0">
                 <a:solidFill>
                   <a:schemeClr val="bg1"/>
                 </a:solidFill>
@@ -4079,7 +4285,7 @@
           </a:p>
           <a:p>
             <a:r>
-              <a:rPr lang="en-US" sz="4000" dirty="0">
+              <a:rPr lang="en-US" sz="5400" dirty="0">
                 <a:solidFill>
                   <a:schemeClr val="bg1"/>
                 </a:solidFill>
@@ -4091,7 +4297,7 @@
           </a:p>
           <a:p>
             <a:r>
-              <a:rPr lang="en-US" sz="4000" dirty="0">
+              <a:rPr lang="en-US" sz="5400" dirty="0">
                 <a:solidFill>
                   <a:schemeClr val="bg1"/>
                 </a:solidFill>
@@ -4106,7 +4312,7 @@
     </p:spTree>
     <p:extLst>
       <p:ext uri="{BB962C8B-B14F-4D97-AF65-F5344CB8AC3E}">
-        <p14:creationId xmlns:p14="http://schemas.microsoft.com/office/powerpoint/2010/main" val="686935259"/>
+        <p14:creationId xmlns:p14="http://schemas.microsoft.com/office/powerpoint/2010/main" val="1773322466"/>
       </p:ext>
     </p:extLst>
   </p:cSld>
